--- a/Material/RésultatsDuSondage.pptx
+++ b/Material/RésultatsDuSondage.pptx
@@ -216,7 +216,7 @@
           <a:p>
             <a:fld id="{5602E388-F933-4E72-A37F-F21843429C01}" type="datetimeFigureOut">
               <a:rPr lang="fr-CA" smtClean="0"/>
-              <a:t>2025-09-02</a:t>
+              <a:t>2026-09-01</a:t>
             </a:fld>
             <a:endParaRPr lang="fr-CA"/>
           </a:p>
@@ -381,7 +381,7 @@
           <a:p>
             <a:fld id="{ED53143B-17E6-ED44-A562-346253D1D3BA}" type="datetimeFigureOut">
               <a:rPr lang="fr-FR" smtClean="0"/>
-              <a:t>02/09/2025</a:t>
+              <a:t>01/09/2026</a:t>
             </a:fld>
             <a:endParaRPr lang="fr-FR"/>
           </a:p>
@@ -692,6 +692,30 @@
           <a:bodyPr/>
           <a:lstStyle/>
           <a:p>
+            <a:r>
+              <a:rPr lang="fr-FR" dirty="0"/>
+              <a:t>https://</a:t>
+            </a:r>
+            <a:r>
+              <a:rPr lang="fr-FR" dirty="0" err="1"/>
+              <a:t>docs.google.com</a:t>
+            </a:r>
+            <a:r>
+              <a:rPr lang="fr-FR" dirty="0"/>
+              <a:t>/</a:t>
+            </a:r>
+            <a:r>
+              <a:rPr lang="fr-FR" dirty="0" err="1"/>
+              <a:t>forms</a:t>
+            </a:r>
+            <a:r>
+              <a:rPr lang="fr-FR" dirty="0"/>
+              <a:t>/d/1aNnLPmR1EnRcfJ0YTDgGgZbaBFgbgc81QKSdEzYOKLY/</a:t>
+            </a:r>
+            <a:r>
+              <a:rPr lang="fr-FR"/>
+              <a:t>edit</a:t>
+            </a:r>
             <a:endParaRPr lang="fr-FR" dirty="0"/>
           </a:p>
         </p:txBody>
@@ -1166,7 +1190,7 @@
             <a:fld id="{5521D5CD-766F-403F-B6DB-8C5247377BF8}" type="datetimeFigureOut">
               <a:rPr lang="fr-CA" smtClean="0"/>
               <a:pPr/>
-              <a:t>2025-09-02</a:t>
+              <a:t>2026-09-01</a:t>
             </a:fld>
             <a:endParaRPr lang="fr-CA"/>
           </a:p>
@@ -1333,7 +1357,7 @@
             <a:fld id="{5521D5CD-766F-403F-B6DB-8C5247377BF8}" type="datetimeFigureOut">
               <a:rPr lang="fr-CA" smtClean="0"/>
               <a:pPr/>
-              <a:t>2025-09-02</a:t>
+              <a:t>2026-09-01</a:t>
             </a:fld>
             <a:endParaRPr lang="fr-CA"/>
           </a:p>
@@ -1510,7 +1534,7 @@
             <a:fld id="{5521D5CD-766F-403F-B6DB-8C5247377BF8}" type="datetimeFigureOut">
               <a:rPr lang="fr-CA" smtClean="0"/>
               <a:pPr/>
-              <a:t>2025-09-02</a:t>
+              <a:t>2026-09-01</a:t>
             </a:fld>
             <a:endParaRPr lang="fr-CA"/>
           </a:p>
@@ -1677,7 +1701,7 @@
             <a:fld id="{5521D5CD-766F-403F-B6DB-8C5247377BF8}" type="datetimeFigureOut">
               <a:rPr lang="fr-CA" smtClean="0"/>
               <a:pPr/>
-              <a:t>2025-09-02</a:t>
+              <a:t>2026-09-01</a:t>
             </a:fld>
             <a:endParaRPr lang="fr-CA"/>
           </a:p>
@@ -1920,7 +1944,7 @@
             <a:fld id="{5521D5CD-766F-403F-B6DB-8C5247377BF8}" type="datetimeFigureOut">
               <a:rPr lang="fr-CA" smtClean="0"/>
               <a:pPr/>
-              <a:t>2025-09-02</a:t>
+              <a:t>2026-09-01</a:t>
             </a:fld>
             <a:endParaRPr lang="fr-CA"/>
           </a:p>
@@ -2205,7 +2229,7 @@
             <a:fld id="{5521D5CD-766F-403F-B6DB-8C5247377BF8}" type="datetimeFigureOut">
               <a:rPr lang="fr-CA" smtClean="0"/>
               <a:pPr/>
-              <a:t>2025-09-02</a:t>
+              <a:t>2026-09-01</a:t>
             </a:fld>
             <a:endParaRPr lang="fr-CA"/>
           </a:p>
@@ -2624,7 +2648,7 @@
             <a:fld id="{5521D5CD-766F-403F-B6DB-8C5247377BF8}" type="datetimeFigureOut">
               <a:rPr lang="fr-CA" smtClean="0"/>
               <a:pPr/>
-              <a:t>2025-09-02</a:t>
+              <a:t>2026-09-01</a:t>
             </a:fld>
             <a:endParaRPr lang="fr-CA"/>
           </a:p>
@@ -2739,7 +2763,7 @@
             <a:fld id="{5521D5CD-766F-403F-B6DB-8C5247377BF8}" type="datetimeFigureOut">
               <a:rPr lang="fr-CA" smtClean="0"/>
               <a:pPr/>
-              <a:t>2025-09-02</a:t>
+              <a:t>2026-09-01</a:t>
             </a:fld>
             <a:endParaRPr lang="fr-CA"/>
           </a:p>
@@ -2831,7 +2855,7 @@
             <a:fld id="{5521D5CD-766F-403F-B6DB-8C5247377BF8}" type="datetimeFigureOut">
               <a:rPr lang="fr-CA" smtClean="0"/>
               <a:pPr/>
-              <a:t>2025-09-02</a:t>
+              <a:t>2026-09-01</a:t>
             </a:fld>
             <a:endParaRPr lang="fr-CA"/>
           </a:p>
@@ -3105,7 +3129,7 @@
             <a:fld id="{5521D5CD-766F-403F-B6DB-8C5247377BF8}" type="datetimeFigureOut">
               <a:rPr lang="fr-CA" smtClean="0"/>
               <a:pPr/>
-              <a:t>2025-09-02</a:t>
+              <a:t>2026-09-01</a:t>
             </a:fld>
             <a:endParaRPr lang="fr-CA"/>
           </a:p>
@@ -3355,7 +3379,7 @@
             <a:fld id="{5521D5CD-766F-403F-B6DB-8C5247377BF8}" type="datetimeFigureOut">
               <a:rPr lang="fr-CA" smtClean="0"/>
               <a:pPr/>
-              <a:t>2025-09-02</a:t>
+              <a:t>2026-09-01</a:t>
             </a:fld>
             <a:endParaRPr lang="fr-CA"/>
           </a:p>
@@ -3565,7 +3589,7 @@
             <a:fld id="{5521D5CD-766F-403F-B6DB-8C5247377BF8}" type="datetimeFigureOut">
               <a:rPr lang="fr-CA" smtClean="0"/>
               <a:pPr/>
-              <a:t>2025-09-02</a:t>
+              <a:t>2026-09-01</a:t>
             </a:fld>
             <a:endParaRPr lang="fr-CA"/>
           </a:p>
@@ -3962,10 +3986,10 @@
       </p:sp>
       <p:pic>
         <p:nvPicPr>
-          <p:cNvPr id="2" name="Picture 1">
+          <p:cNvPr id="3" name="Picture 2">
             <a:extLst>
               <a:ext uri="{FF2B5EF4-FFF2-40B4-BE49-F238E27FC236}">
-                <a16:creationId xmlns:a16="http://schemas.microsoft.com/office/drawing/2014/main" id="{FBB37901-B905-BA14-BFCE-AFB65801FA84}"/>
+                <a16:creationId xmlns:a16="http://schemas.microsoft.com/office/drawing/2014/main" id="{69EA3187-DABF-FF9E-F9BD-9BAF462E5559}"/>
               </a:ext>
             </a:extLst>
           </p:cNvPr>
@@ -3982,8 +4006,8 @@
         </p:blipFill>
         <p:spPr>
           <a:xfrm>
-            <a:off x="457200" y="1628800"/>
-            <a:ext cx="8363272" cy="4784393"/>
+            <a:off x="685800" y="1844824"/>
+            <a:ext cx="7772400" cy="4458043"/>
           </a:xfrm>
           <a:prstGeom prst="rect">
             <a:avLst/>
@@ -4028,7 +4052,7 @@
         <p:spPr/>
         <p:txBody>
           <a:bodyPr>
-            <a:normAutofit/>
+            <a:normAutofit fontScale="90000"/>
           </a:bodyPr>
           <a:lstStyle/>
           <a:p>
@@ -4042,7 +4066,7 @@
             </a:r>
             <a:r>
               <a:rPr lang="fr-CA" dirty="0"/>
-              <a:t> d’experts aux questions</a:t>
+              <a:t> de deux experts aux questions</a:t>
             </a:r>
           </a:p>
         </p:txBody>
@@ -5418,89 +5442,12 @@
           <a:chExt cx="0" cy="0"/>
         </a:xfrm>
       </p:grpSpPr>
-      <p:sp>
-        <p:nvSpPr>
-          <p:cNvPr id="2" name="Title 1"/>
-          <p:cNvSpPr>
-            <a:spLocks noGrp="1"/>
-          </p:cNvSpPr>
-          <p:nvPr>
-            <p:ph type="title"/>
-          </p:nvPr>
-        </p:nvSpPr>
-        <p:spPr/>
-        <p:txBody>
-          <a:bodyPr>
-            <a:normAutofit fontScale="90000"/>
-          </a:bodyPr>
-          <a:lstStyle/>
-          <a:p>
-            <a:r>
-              <a:rPr lang="fr-CA" dirty="0"/>
-              <a:t>Calibration vs. Information des</a:t>
-            </a:r>
-            <a:br>
-              <a:rPr lang="fr-CA" dirty="0"/>
-            </a:br>
-            <a:r>
-              <a:rPr lang="fr-CA" dirty="0"/>
-              <a:t>10+169 participants</a:t>
-            </a:r>
-          </a:p>
-        </p:txBody>
-      </p:sp>
-      <p:sp>
-        <p:nvSpPr>
-          <p:cNvPr id="5" name="Oval 4"/>
-          <p:cNvSpPr/>
-          <p:nvPr/>
-        </p:nvSpPr>
-        <p:spPr>
-          <a:xfrm>
-            <a:off x="7829282" y="4912568"/>
-            <a:ext cx="288032" cy="288032"/>
-          </a:xfrm>
-          <a:prstGeom prst="ellipse">
-            <a:avLst/>
-          </a:prstGeom>
-          <a:solidFill>
-            <a:schemeClr val="bg1"/>
-          </a:solidFill>
-          <a:ln>
-            <a:noFill/>
-          </a:ln>
-        </p:spPr>
-        <p:style>
-          <a:lnRef idx="2">
-            <a:schemeClr val="accent1">
-              <a:shade val="50000"/>
-            </a:schemeClr>
-          </a:lnRef>
-          <a:fillRef idx="1">
-            <a:schemeClr val="accent1"/>
-          </a:fillRef>
-          <a:effectRef idx="0">
-            <a:schemeClr val="accent1"/>
-          </a:effectRef>
-          <a:fontRef idx="minor">
-            <a:schemeClr val="lt1"/>
-          </a:fontRef>
-        </p:style>
-        <p:txBody>
-          <a:bodyPr rtlCol="0" anchor="ctr"/>
-          <a:lstStyle/>
-          <a:p>
-            <a:pPr algn="ctr"/>
-            <a:endParaRPr lang="en-CA"/>
-          </a:p>
-        </p:txBody>
-      </p:sp>
       <p:pic>
         <p:nvPicPr>
-          <p:cNvPr id="3" name="Picture 2">
+          <p:cNvPr id="7" name="Picture 6">
             <a:extLst>
               <a:ext uri="{FF2B5EF4-FFF2-40B4-BE49-F238E27FC236}">
-                <a16:creationId xmlns:a16="http://schemas.microsoft.com/office/drawing/2014/main" id="{C9ED621C-36B3-ADA3-7713-54DAD9F25B6F}"/>
+                <a16:creationId xmlns:a16="http://schemas.microsoft.com/office/drawing/2014/main" id="{1F6B428A-D33A-8B5F-F99B-50304305E825}"/>
               </a:ext>
             </a:extLst>
           </p:cNvPr>
@@ -5517,14 +5464,45 @@
         </p:blipFill>
         <p:spPr>
           <a:xfrm>
-            <a:off x="301558" y="1842165"/>
-            <a:ext cx="8540884" cy="4360210"/>
+            <a:off x="323528" y="1826212"/>
+            <a:ext cx="8503048" cy="4360209"/>
           </a:xfrm>
           <a:prstGeom prst="rect">
             <a:avLst/>
           </a:prstGeom>
         </p:spPr>
       </p:pic>
+      <p:sp>
+        <p:nvSpPr>
+          <p:cNvPr id="2" name="Title 1"/>
+          <p:cNvSpPr>
+            <a:spLocks noGrp="1"/>
+          </p:cNvSpPr>
+          <p:nvPr>
+            <p:ph type="title"/>
+          </p:nvPr>
+        </p:nvSpPr>
+        <p:spPr/>
+        <p:txBody>
+          <a:bodyPr>
+            <a:normAutofit fontScale="90000"/>
+          </a:bodyPr>
+          <a:lstStyle/>
+          <a:p>
+            <a:r>
+              <a:rPr lang="fr-CA" dirty="0"/>
+              <a:t>Calibration vs. Information des</a:t>
+            </a:r>
+            <a:br>
+              <a:rPr lang="fr-CA" dirty="0"/>
+            </a:br>
+            <a:r>
+              <a:rPr lang="fr-CA" dirty="0"/>
+              <a:t>10+169 participants</a:t>
+            </a:r>
+          </a:p>
+        </p:txBody>
+      </p:sp>
     </p:spTree>
     <p:extLst>
       <p:ext uri="{BB962C8B-B14F-4D97-AF65-F5344CB8AC3E}">
@@ -5557,10 +5535,10 @@
       </p:grpSpPr>
       <p:pic>
         <p:nvPicPr>
-          <p:cNvPr id="3" name="Picture 2">
+          <p:cNvPr id="4" name="Picture 3">
             <a:extLst>
               <a:ext uri="{FF2B5EF4-FFF2-40B4-BE49-F238E27FC236}">
-                <a16:creationId xmlns:a16="http://schemas.microsoft.com/office/drawing/2014/main" id="{46D005A2-AF2B-1763-A2DE-A69E652A9DC0}"/>
+                <a16:creationId xmlns:a16="http://schemas.microsoft.com/office/drawing/2014/main" id="{A6410A14-CD15-0A77-C358-8518F91E6533}"/>
               </a:ext>
             </a:extLst>
           </p:cNvPr>
@@ -5577,8 +5555,8 @@
         </p:blipFill>
         <p:spPr>
           <a:xfrm>
-            <a:off x="301558" y="1842165"/>
-            <a:ext cx="8540884" cy="4360210"/>
+            <a:off x="323528" y="1826212"/>
+            <a:ext cx="8503048" cy="4360209"/>
           </a:xfrm>
           <a:prstGeom prst="rect">
             <a:avLst/>
@@ -6104,14 +6082,14 @@
           <p:nvPr>
             <p:extLst>
               <p:ext uri="{D42A27DB-BD31-4B8C-83A1-F6EECF244321}">
-                <p14:modId xmlns:p14="http://schemas.microsoft.com/office/powerpoint/2010/main" val="582480117"/>
+                <p14:modId xmlns:p14="http://schemas.microsoft.com/office/powerpoint/2010/main" val="1544055611"/>
               </p:ext>
             </p:extLst>
           </p:nvPr>
         </p:nvGraphicFramePr>
         <p:xfrm>
-          <a:off x="2931888" y="1700808"/>
-          <a:ext cx="4160391" cy="4257571"/>
+          <a:off x="518418" y="1340768"/>
+          <a:ext cx="3333502" cy="4104456"/>
         </p:xfrm>
         <a:graphic>
           <a:graphicData uri="http://schemas.openxmlformats.org/drawingml/2006/table">
@@ -6120,14 +6098,14 @@
                 <a:tableStyleId>{5C22544A-7EE6-4342-B048-85BDC9FD1C3A}</a:tableStyleId>
               </a:tblPr>
               <a:tblGrid>
-                <a:gridCol w="1694491">
+                <a:gridCol w="1324278">
                   <a:extLst>
                     <a:ext uri="{9D8B030D-6E8A-4147-A177-3AD203B41FA5}">
                       <a16:colId xmlns:a16="http://schemas.microsoft.com/office/drawing/2014/main" val="20000"/>
                     </a:ext>
                   </a:extLst>
                 </a:gridCol>
-                <a:gridCol w="2465900">
+                <a:gridCol w="2009224">
                   <a:extLst>
                     <a:ext uri="{9D8B030D-6E8A-4147-A177-3AD203B41FA5}">
                       <a16:colId xmlns:a16="http://schemas.microsoft.com/office/drawing/2014/main" val="20001"/>
@@ -6135,7 +6113,7 @@
                   </a:extLst>
                 </a:gridCol>
               </a:tblGrid>
-              <a:tr h="723161">
+              <a:tr h="824421">
                 <a:tc>
                   <a:txBody>
                     <a:bodyPr/>
@@ -6262,54 +6240,50 @@
                   </a:ext>
                 </a:extLst>
               </a:tr>
-              <a:tr h="261560">
-                <a:tc>
-                  <a:txBody>
-                    <a:bodyPr/>
-                    <a:lstStyle/>
-                    <a:p>
-                      <a:pPr algn="r" fontAlgn="b">
+              <a:tr h="298185">
+                <a:tc>
+                  <a:txBody>
+                    <a:bodyPr/>
+                    <a:lstStyle/>
+                    <a:p>
+                      <a:pPr algn="ctr" fontAlgn="b">
                         <a:buNone/>
                       </a:pPr>
                       <a:r>
-                        <a:rPr lang="en-CA" sz="1800" b="0" i="0" u="none" strike="noStrike" kern="1200" dirty="0">
+                        <a:rPr lang="en-CA" sz="1100" b="0" i="0" u="none" strike="noStrike" dirty="0">
                           <a:solidFill>
                             <a:srgbClr val="000000"/>
                           </a:solidFill>
                           <a:effectLst/>
-                          <a:latin typeface="Calibri" charset="0"/>
-                          <a:ea typeface="+mn-ea"/>
-                          <a:cs typeface="+mn-cs"/>
+                          <a:latin typeface="Calibri" panose="020F0502020204030204" pitchFamily="34" charset="0"/>
                         </a:rPr>
-                        <a:t>2914599</a:t>
-                      </a:r>
-                    </a:p>
-                  </a:txBody>
-                  <a:tcPr marL="9525" marR="9525" marT="9525" marB="0" anchor="b"/>
-                </a:tc>
-                <a:tc>
-                  <a:txBody>
-                    <a:bodyPr/>
-                    <a:lstStyle/>
-                    <a:p>
-                      <a:pPr marL="0" algn="r" defTabSz="914400" rtl="0" eaLnBrk="1" fontAlgn="b" latinLnBrk="0" hangingPunct="1">
+                        <a:t>8/31/2026 10:32:29</a:t>
+                      </a:r>
+                    </a:p>
+                  </a:txBody>
+                  <a:tcPr marL="9525" marR="9525" marT="9525" marB="0" anchor="ctr"/>
+                </a:tc>
+                <a:tc>
+                  <a:txBody>
+                    <a:bodyPr/>
+                    <a:lstStyle/>
+                    <a:p>
+                      <a:pPr algn="ctr" fontAlgn="b">
                         <a:buNone/>
                       </a:pPr>
                       <a:r>
-                        <a:rPr lang="en-CA" sz="1800" b="0" i="0" u="none" strike="noStrike" kern="1200" dirty="0">
+                        <a:rPr lang="en-CA" sz="1100" b="0" i="0" u="none" strike="noStrike" dirty="0">
                           <a:solidFill>
                             <a:srgbClr val="000000"/>
                           </a:solidFill>
                           <a:effectLst/>
-                          <a:latin typeface="Calibri" charset="0"/>
-                          <a:ea typeface="+mn-ea"/>
-                          <a:cs typeface="+mn-cs"/>
+                          <a:latin typeface="Calibri" panose="020F0502020204030204" pitchFamily="34" charset="0"/>
                         </a:rPr>
-                        <a:t>0%</a:t>
-                      </a:r>
-                    </a:p>
-                  </a:txBody>
-                  <a:tcPr marL="9525" marR="9525" marT="9525" marB="0" anchor="b"/>
+                        <a:t>3%</a:t>
+                      </a:r>
+                    </a:p>
+                  </a:txBody>
+                  <a:tcPr marL="9525" marR="9525" marT="9525" marB="0" anchor="ctr"/>
                 </a:tc>
                 <a:extLst>
                   <a:ext uri="{0D108BD9-81ED-4DB2-BD59-A6C34878D82A}">
@@ -6317,54 +6291,839 @@
                   </a:ext>
                 </a:extLst>
               </a:tr>
-              <a:tr h="370840">
-                <a:tc>
-                  <a:txBody>
-                    <a:bodyPr/>
-                    <a:lstStyle/>
-                    <a:p>
-                      <a:pPr algn="r" fontAlgn="b">
+              <a:tr h="298185">
+                <a:tc>
+                  <a:txBody>
+                    <a:bodyPr/>
+                    <a:lstStyle/>
+                    <a:p>
+                      <a:pPr algn="ctr" fontAlgn="b">
                         <a:buNone/>
                       </a:pPr>
                       <a:r>
-                        <a:rPr lang="en-CA" sz="1800" b="0" i="0" u="none" strike="noStrike" kern="1200" dirty="0">
+                        <a:rPr lang="en-CA" sz="1100" b="0" i="0" u="none" strike="noStrike" dirty="0">
                           <a:solidFill>
                             <a:srgbClr val="000000"/>
                           </a:solidFill>
                           <a:effectLst/>
-                          <a:latin typeface="Calibri" charset="0"/>
-                          <a:ea typeface="+mn-ea"/>
-                          <a:cs typeface="+mn-cs"/>
+                          <a:latin typeface="Calibri" panose="020F0502020204030204" pitchFamily="34" charset="0"/>
                         </a:rPr>
-                        <a:t>2914737</a:t>
-                      </a:r>
-                    </a:p>
-                  </a:txBody>
-                  <a:tcPr marL="9525" marR="9525" marT="9525" marB="0" anchor="b"/>
-                </a:tc>
-                <a:tc>
-                  <a:txBody>
-                    <a:bodyPr/>
-                    <a:lstStyle/>
-                    <a:p>
-                      <a:pPr marL="0" algn="r" defTabSz="914400" rtl="0" eaLnBrk="1" fontAlgn="b" latinLnBrk="0" hangingPunct="1">
+                        <a:t>8/25/2026 20:52:46</a:t>
+                      </a:r>
+                    </a:p>
+                  </a:txBody>
+                  <a:tcPr marL="9525" marR="9525" marT="9525" marB="0" anchor="ctr"/>
+                </a:tc>
+                <a:tc>
+                  <a:txBody>
+                    <a:bodyPr/>
+                    <a:lstStyle/>
+                    <a:p>
+                      <a:pPr algn="ctr" fontAlgn="b">
                         <a:buNone/>
                       </a:pPr>
                       <a:r>
-                        <a:rPr lang="en-CA" sz="1800" b="0" i="0" u="none" strike="noStrike" kern="1200" dirty="0">
+                        <a:rPr lang="en-CA" sz="1100" b="0" i="0" u="none" strike="noStrike" dirty="0">
                           <a:solidFill>
                             <a:srgbClr val="000000"/>
                           </a:solidFill>
                           <a:effectLst/>
-                          <a:latin typeface="Calibri" charset="0"/>
-                          <a:ea typeface="+mn-ea"/>
-                          <a:cs typeface="+mn-cs"/>
+                          <a:latin typeface="Calibri" panose="020F0502020204030204" pitchFamily="34" charset="0"/>
                         </a:rPr>
-                        <a:t>0%</a:t>
-                      </a:r>
-                    </a:p>
-                  </a:txBody>
-                  <a:tcPr marL="9525" marR="9525" marT="9525" marB="0" anchor="b"/>
+                        <a:t>16%</a:t>
+                      </a:r>
+                    </a:p>
+                  </a:txBody>
+                  <a:tcPr marL="9525" marR="9525" marT="9525" marB="0" anchor="ctr"/>
+                </a:tc>
+                <a:extLst>
+                  <a:ext uri="{0D108BD9-81ED-4DB2-BD59-A6C34878D82A}">
+                    <a16:rowId xmlns:a16="http://schemas.microsoft.com/office/drawing/2014/main" val="1514754976"/>
+                  </a:ext>
+                </a:extLst>
+              </a:tr>
+              <a:tr h="298185">
+                <a:tc>
+                  <a:txBody>
+                    <a:bodyPr/>
+                    <a:lstStyle/>
+                    <a:p>
+                      <a:pPr algn="ctr" fontAlgn="b">
+                        <a:buNone/>
+                      </a:pPr>
+                      <a:r>
+                        <a:rPr lang="en-CA" sz="1100" b="0" i="0" u="none" strike="noStrike" dirty="0">
+                          <a:solidFill>
+                            <a:srgbClr val="000000"/>
+                          </a:solidFill>
+                          <a:effectLst/>
+                          <a:latin typeface="Calibri" panose="020F0502020204030204" pitchFamily="34" charset="0"/>
+                        </a:rPr>
+                        <a:t>8/29/2026 17:11:05</a:t>
+                      </a:r>
+                    </a:p>
+                  </a:txBody>
+                  <a:tcPr marL="9525" marR="9525" marT="9525" marB="0" anchor="ctr"/>
+                </a:tc>
+                <a:tc>
+                  <a:txBody>
+                    <a:bodyPr/>
+                    <a:lstStyle/>
+                    <a:p>
+                      <a:pPr algn="ctr" fontAlgn="b">
+                        <a:buNone/>
+                      </a:pPr>
+                      <a:r>
+                        <a:rPr lang="en-CA" sz="1100" b="0" i="0" u="none" strike="noStrike" dirty="0">
+                          <a:solidFill>
+                            <a:srgbClr val="000000"/>
+                          </a:solidFill>
+                          <a:effectLst/>
+                          <a:latin typeface="Calibri" panose="020F0502020204030204" pitchFamily="34" charset="0"/>
+                        </a:rPr>
+                        <a:t>31%</a:t>
+                      </a:r>
+                    </a:p>
+                  </a:txBody>
+                  <a:tcPr marL="9525" marR="9525" marT="9525" marB="0" anchor="ctr"/>
+                </a:tc>
+                <a:extLst>
+                  <a:ext uri="{0D108BD9-81ED-4DB2-BD59-A6C34878D82A}">
+                    <a16:rowId xmlns:a16="http://schemas.microsoft.com/office/drawing/2014/main" val="2320566742"/>
+                  </a:ext>
+                </a:extLst>
+              </a:tr>
+              <a:tr h="298185">
+                <a:tc>
+                  <a:txBody>
+                    <a:bodyPr/>
+                    <a:lstStyle/>
+                    <a:p>
+                      <a:pPr algn="ctr" fontAlgn="b">
+                        <a:buNone/>
+                      </a:pPr>
+                      <a:r>
+                        <a:rPr lang="en-CA" sz="1100" b="0" i="0" u="none" strike="noStrike">
+                          <a:solidFill>
+                            <a:srgbClr val="000000"/>
+                          </a:solidFill>
+                          <a:effectLst/>
+                          <a:latin typeface="Calibri" panose="020F0502020204030204" pitchFamily="34" charset="0"/>
+                        </a:rPr>
+                        <a:t>8/31/2026 19:27:44</a:t>
+                      </a:r>
+                    </a:p>
+                  </a:txBody>
+                  <a:tcPr marL="9525" marR="9525" marT="9525" marB="0" anchor="ctr"/>
+                </a:tc>
+                <a:tc>
+                  <a:txBody>
+                    <a:bodyPr/>
+                    <a:lstStyle/>
+                    <a:p>
+                      <a:pPr algn="ctr" fontAlgn="b">
+                        <a:buNone/>
+                      </a:pPr>
+                      <a:r>
+                        <a:rPr lang="en-CA" sz="1100" b="0" i="0" u="none" strike="noStrike" dirty="0">
+                          <a:solidFill>
+                            <a:srgbClr val="000000"/>
+                          </a:solidFill>
+                          <a:effectLst/>
+                          <a:latin typeface="Calibri" panose="020F0502020204030204" pitchFamily="34" charset="0"/>
+                        </a:rPr>
+                        <a:t>57%</a:t>
+                      </a:r>
+                    </a:p>
+                  </a:txBody>
+                  <a:tcPr marL="9525" marR="9525" marT="9525" marB="0" anchor="ctr"/>
+                </a:tc>
+                <a:extLst>
+                  <a:ext uri="{0D108BD9-81ED-4DB2-BD59-A6C34878D82A}">
+                    <a16:rowId xmlns:a16="http://schemas.microsoft.com/office/drawing/2014/main" val="1344318590"/>
+                  </a:ext>
+                </a:extLst>
+              </a:tr>
+              <a:tr h="298185">
+                <a:tc>
+                  <a:txBody>
+                    <a:bodyPr/>
+                    <a:lstStyle/>
+                    <a:p>
+                      <a:pPr algn="ctr" fontAlgn="b">
+                        <a:buNone/>
+                      </a:pPr>
+                      <a:r>
+                        <a:rPr lang="en-CA" sz="1100" b="0" i="0" u="none" strike="noStrike">
+                          <a:solidFill>
+                            <a:srgbClr val="000000"/>
+                          </a:solidFill>
+                          <a:effectLst/>
+                          <a:latin typeface="Calibri" panose="020F0502020204030204" pitchFamily="34" charset="0"/>
+                        </a:rPr>
+                        <a:t>8/25/2026 21:20:35</a:t>
+                      </a:r>
+                    </a:p>
+                  </a:txBody>
+                  <a:tcPr marL="9525" marR="9525" marT="9525" marB="0" anchor="ctr"/>
+                </a:tc>
+                <a:tc>
+                  <a:txBody>
+                    <a:bodyPr/>
+                    <a:lstStyle/>
+                    <a:p>
+                      <a:pPr algn="ctr" fontAlgn="b">
+                        <a:buNone/>
+                      </a:pPr>
+                      <a:r>
+                        <a:rPr lang="en-CA" sz="1100" b="0" i="0" u="none" strike="noStrike" dirty="0">
+                          <a:solidFill>
+                            <a:srgbClr val="000000"/>
+                          </a:solidFill>
+                          <a:effectLst/>
+                          <a:latin typeface="Calibri" panose="020F0502020204030204" pitchFamily="34" charset="0"/>
+                        </a:rPr>
+                        <a:t>83%</a:t>
+                      </a:r>
+                    </a:p>
+                  </a:txBody>
+                  <a:tcPr marL="9525" marR="9525" marT="9525" marB="0" anchor="ctr"/>
+                </a:tc>
+                <a:extLst>
+                  <a:ext uri="{0D108BD9-81ED-4DB2-BD59-A6C34878D82A}">
+                    <a16:rowId xmlns:a16="http://schemas.microsoft.com/office/drawing/2014/main" val="2970048133"/>
+                  </a:ext>
+                </a:extLst>
+              </a:tr>
+              <a:tr h="298185">
+                <a:tc>
+                  <a:txBody>
+                    <a:bodyPr/>
+                    <a:lstStyle/>
+                    <a:p>
+                      <a:pPr algn="ctr" fontAlgn="b">
+                        <a:buNone/>
+                      </a:pPr>
+                      <a:r>
+                        <a:rPr lang="en-CA" sz="1100" b="0" i="0" u="none" strike="noStrike">
+                          <a:solidFill>
+                            <a:srgbClr val="000000"/>
+                          </a:solidFill>
+                          <a:effectLst/>
+                          <a:latin typeface="Calibri" panose="020F0502020204030204" pitchFamily="34" charset="0"/>
+                        </a:rPr>
+                        <a:t>8/26/2026 18:50:45</a:t>
+                      </a:r>
+                    </a:p>
+                  </a:txBody>
+                  <a:tcPr marL="9525" marR="9525" marT="9525" marB="0" anchor="ctr"/>
+                </a:tc>
+                <a:tc>
+                  <a:txBody>
+                    <a:bodyPr/>
+                    <a:lstStyle/>
+                    <a:p>
+                      <a:pPr algn="ctr" fontAlgn="b">
+                        <a:buNone/>
+                      </a:pPr>
+                      <a:r>
+                        <a:rPr lang="en-CA" sz="1100" b="0" i="0" u="none" strike="noStrike" dirty="0">
+                          <a:solidFill>
+                            <a:srgbClr val="000000"/>
+                          </a:solidFill>
+                          <a:effectLst/>
+                          <a:latin typeface="Calibri" panose="020F0502020204030204" pitchFamily="34" charset="0"/>
+                        </a:rPr>
+                        <a:t>179%</a:t>
+                      </a:r>
+                    </a:p>
+                  </a:txBody>
+                  <a:tcPr marL="9525" marR="9525" marT="9525" marB="0" anchor="ctr"/>
+                </a:tc>
+                <a:extLst>
+                  <a:ext uri="{0D108BD9-81ED-4DB2-BD59-A6C34878D82A}">
+                    <a16:rowId xmlns:a16="http://schemas.microsoft.com/office/drawing/2014/main" val="1914496331"/>
+                  </a:ext>
+                </a:extLst>
+              </a:tr>
+              <a:tr h="298185">
+                <a:tc>
+                  <a:txBody>
+                    <a:bodyPr/>
+                    <a:lstStyle/>
+                    <a:p>
+                      <a:pPr algn="ctr" fontAlgn="b">
+                        <a:buNone/>
+                      </a:pPr>
+                      <a:r>
+                        <a:rPr lang="en-CA" sz="1100" b="0" i="0" u="none" strike="noStrike">
+                          <a:solidFill>
+                            <a:srgbClr val="000000"/>
+                          </a:solidFill>
+                          <a:effectLst/>
+                          <a:latin typeface="Calibri" panose="020F0502020204030204" pitchFamily="34" charset="0"/>
+                        </a:rPr>
+                        <a:t>8/31/2026 18:49:18</a:t>
+                      </a:r>
+                    </a:p>
+                  </a:txBody>
+                  <a:tcPr marL="9525" marR="9525" marT="9525" marB="0" anchor="ctr"/>
+                </a:tc>
+                <a:tc>
+                  <a:txBody>
+                    <a:bodyPr/>
+                    <a:lstStyle/>
+                    <a:p>
+                      <a:pPr algn="ctr" fontAlgn="b">
+                        <a:buNone/>
+                      </a:pPr>
+                      <a:r>
+                        <a:rPr lang="en-CA" sz="1100" b="0" i="0" u="none" strike="noStrike" dirty="0">
+                          <a:solidFill>
+                            <a:srgbClr val="000000"/>
+                          </a:solidFill>
+                          <a:effectLst/>
+                          <a:latin typeface="Calibri" panose="020F0502020204030204" pitchFamily="34" charset="0"/>
+                        </a:rPr>
+                        <a:t>188%</a:t>
+                      </a:r>
+                    </a:p>
+                  </a:txBody>
+                  <a:tcPr marL="9525" marR="9525" marT="9525" marB="0" anchor="ctr"/>
+                </a:tc>
+                <a:extLst>
+                  <a:ext uri="{0D108BD9-81ED-4DB2-BD59-A6C34878D82A}">
+                    <a16:rowId xmlns:a16="http://schemas.microsoft.com/office/drawing/2014/main" val="413786676"/>
+                  </a:ext>
+                </a:extLst>
+              </a:tr>
+              <a:tr h="298185">
+                <a:tc>
+                  <a:txBody>
+                    <a:bodyPr/>
+                    <a:lstStyle/>
+                    <a:p>
+                      <a:pPr algn="ctr" fontAlgn="b">
+                        <a:buNone/>
+                      </a:pPr>
+                      <a:r>
+                        <a:rPr lang="en-CA" sz="1100" b="0" i="0" u="none" strike="noStrike">
+                          <a:solidFill>
+                            <a:srgbClr val="000000"/>
+                          </a:solidFill>
+                          <a:effectLst/>
+                          <a:latin typeface="Calibri" panose="020F0502020204030204" pitchFamily="34" charset="0"/>
+                        </a:rPr>
+                        <a:t>8/27/2026 17:57:13</a:t>
+                      </a:r>
+                    </a:p>
+                  </a:txBody>
+                  <a:tcPr marL="9525" marR="9525" marT="9525" marB="0" anchor="ctr"/>
+                </a:tc>
+                <a:tc>
+                  <a:txBody>
+                    <a:bodyPr/>
+                    <a:lstStyle/>
+                    <a:p>
+                      <a:pPr algn="ctr" fontAlgn="b">
+                        <a:buNone/>
+                      </a:pPr>
+                      <a:r>
+                        <a:rPr lang="en-CA" sz="1100" b="0" i="0" u="none" strike="noStrike" dirty="0">
+                          <a:solidFill>
+                            <a:srgbClr val="000000"/>
+                          </a:solidFill>
+                          <a:effectLst/>
+                          <a:latin typeface="Calibri" panose="020F0502020204030204" pitchFamily="34" charset="0"/>
+                        </a:rPr>
+                        <a:t>213%</a:t>
+                      </a:r>
+                    </a:p>
+                  </a:txBody>
+                  <a:tcPr marL="9525" marR="9525" marT="9525" marB="0" anchor="ctr"/>
+                </a:tc>
+                <a:extLst>
+                  <a:ext uri="{0D108BD9-81ED-4DB2-BD59-A6C34878D82A}">
+                    <a16:rowId xmlns:a16="http://schemas.microsoft.com/office/drawing/2014/main" val="710036177"/>
+                  </a:ext>
+                </a:extLst>
+              </a:tr>
+              <a:tr h="298185">
+                <a:tc>
+                  <a:txBody>
+                    <a:bodyPr/>
+                    <a:lstStyle/>
+                    <a:p>
+                      <a:pPr algn="ctr" fontAlgn="b">
+                        <a:buNone/>
+                      </a:pPr>
+                      <a:r>
+                        <a:rPr lang="en-CA" sz="1100" b="0" i="0" u="none" strike="noStrike">
+                          <a:solidFill>
+                            <a:srgbClr val="000000"/>
+                          </a:solidFill>
+                          <a:effectLst/>
+                          <a:latin typeface="Calibri" panose="020F0502020204030204" pitchFamily="34" charset="0"/>
+                        </a:rPr>
+                        <a:t>8/30/2026 15:26:13</a:t>
+                      </a:r>
+                    </a:p>
+                  </a:txBody>
+                  <a:tcPr marL="9525" marR="9525" marT="9525" marB="0" anchor="ctr"/>
+                </a:tc>
+                <a:tc>
+                  <a:txBody>
+                    <a:bodyPr/>
+                    <a:lstStyle/>
+                    <a:p>
+                      <a:pPr algn="ctr" fontAlgn="b">
+                        <a:buNone/>
+                      </a:pPr>
+                      <a:r>
+                        <a:rPr lang="en-CA" sz="1100" b="0" i="0" u="none" strike="noStrike" dirty="0">
+                          <a:solidFill>
+                            <a:srgbClr val="000000"/>
+                          </a:solidFill>
+                          <a:effectLst/>
+                          <a:latin typeface="Calibri" panose="020F0502020204030204" pitchFamily="34" charset="0"/>
+                        </a:rPr>
+                        <a:t>438%</a:t>
+                      </a:r>
+                    </a:p>
+                  </a:txBody>
+                  <a:tcPr marL="9525" marR="9525" marT="9525" marB="0" anchor="ctr"/>
+                </a:tc>
+                <a:extLst>
+                  <a:ext uri="{0D108BD9-81ED-4DB2-BD59-A6C34878D82A}">
+                    <a16:rowId xmlns:a16="http://schemas.microsoft.com/office/drawing/2014/main" val="1534070311"/>
+                  </a:ext>
+                </a:extLst>
+              </a:tr>
+              <a:tr h="298185">
+                <a:tc>
+                  <a:txBody>
+                    <a:bodyPr/>
+                    <a:lstStyle/>
+                    <a:p>
+                      <a:pPr algn="ctr" fontAlgn="b">
+                        <a:buNone/>
+                      </a:pPr>
+                      <a:r>
+                        <a:rPr lang="en-CA" sz="1100" b="0" i="0" u="none" strike="noStrike">
+                          <a:solidFill>
+                            <a:srgbClr val="000000"/>
+                          </a:solidFill>
+                          <a:effectLst/>
+                          <a:latin typeface="Calibri" panose="020F0502020204030204" pitchFamily="34" charset="0"/>
+                        </a:rPr>
+                        <a:t>8/25/2026 20:14:28</a:t>
+                      </a:r>
+                    </a:p>
+                  </a:txBody>
+                  <a:tcPr marL="9525" marR="9525" marT="9525" marB="0" anchor="ctr"/>
+                </a:tc>
+                <a:tc>
+                  <a:txBody>
+                    <a:bodyPr/>
+                    <a:lstStyle/>
+                    <a:p>
+                      <a:pPr algn="ctr" fontAlgn="b">
+                        <a:buNone/>
+                      </a:pPr>
+                      <a:r>
+                        <a:rPr lang="en-CA" sz="1100" b="0" i="0" u="none" strike="noStrike" dirty="0">
+                          <a:solidFill>
+                            <a:srgbClr val="000000"/>
+                          </a:solidFill>
+                          <a:effectLst/>
+                          <a:latin typeface="Calibri" panose="020F0502020204030204" pitchFamily="34" charset="0"/>
+                        </a:rPr>
+                        <a:t>712%</a:t>
+                      </a:r>
+                    </a:p>
+                  </a:txBody>
+                  <a:tcPr marL="9525" marR="9525" marT="9525" marB="0" anchor="ctr"/>
+                </a:tc>
+                <a:extLst>
+                  <a:ext uri="{0D108BD9-81ED-4DB2-BD59-A6C34878D82A}">
+                    <a16:rowId xmlns:a16="http://schemas.microsoft.com/office/drawing/2014/main" val="2658869707"/>
+                  </a:ext>
+                </a:extLst>
+              </a:tr>
+              <a:tr h="298185">
+                <a:tc>
+                  <a:txBody>
+                    <a:bodyPr/>
+                    <a:lstStyle/>
+                    <a:p>
+                      <a:pPr algn="ctr" fontAlgn="b">
+                        <a:buNone/>
+                      </a:pPr>
+                      <a:r>
+                        <a:rPr lang="en-CA" sz="1100" b="0" i="0" u="none" strike="noStrike">
+                          <a:solidFill>
+                            <a:srgbClr val="000000"/>
+                          </a:solidFill>
+                          <a:effectLst/>
+                          <a:latin typeface="Calibri" panose="020F0502020204030204" pitchFamily="34" charset="0"/>
+                        </a:rPr>
+                        <a:t>8/28/2026 16:47:58</a:t>
+                      </a:r>
+                    </a:p>
+                  </a:txBody>
+                  <a:tcPr marL="9525" marR="9525" marT="9525" marB="0" anchor="ctr"/>
+                </a:tc>
+                <a:tc>
+                  <a:txBody>
+                    <a:bodyPr/>
+                    <a:lstStyle/>
+                    <a:p>
+                      <a:pPr algn="ctr" fontAlgn="b">
+                        <a:buNone/>
+                      </a:pPr>
+                      <a:r>
+                        <a:rPr lang="en-CA" sz="1100" b="0" i="0" u="none" strike="noStrike" dirty="0">
+                          <a:solidFill>
+                            <a:srgbClr val="000000"/>
+                          </a:solidFill>
+                          <a:effectLst/>
+                          <a:latin typeface="Calibri" panose="020F0502020204030204" pitchFamily="34" charset="0"/>
+                        </a:rPr>
+                        <a:t>755%</a:t>
+                      </a:r>
+                    </a:p>
+                  </a:txBody>
+                  <a:tcPr marL="9525" marR="9525" marT="9525" marB="0" anchor="ctr"/>
+                </a:tc>
+                <a:extLst>
+                  <a:ext uri="{0D108BD9-81ED-4DB2-BD59-A6C34878D82A}">
+                    <a16:rowId xmlns:a16="http://schemas.microsoft.com/office/drawing/2014/main" val="2940003167"/>
+                  </a:ext>
+                </a:extLst>
+              </a:tr>
+            </a:tbl>
+          </a:graphicData>
+        </a:graphic>
+      </p:graphicFrame>
+      <p:graphicFrame>
+        <p:nvGraphicFramePr>
+          <p:cNvPr id="6" name="Content Placeholder 8">
+            <a:extLst>
+              <a:ext uri="{FF2B5EF4-FFF2-40B4-BE49-F238E27FC236}">
+                <a16:creationId xmlns:a16="http://schemas.microsoft.com/office/drawing/2014/main" id="{949C5638-CDBD-E3B1-1BAB-5ED5EA9B9694}"/>
+              </a:ext>
+            </a:extLst>
+          </p:cNvPr>
+          <p:cNvGraphicFramePr>
+            <a:graphicFrameLocks/>
+          </p:cNvGraphicFramePr>
+          <p:nvPr>
+            <p:extLst>
+              <p:ext uri="{D42A27DB-BD31-4B8C-83A1-F6EECF244321}">
+                <p14:modId xmlns:p14="http://schemas.microsoft.com/office/powerpoint/2010/main" val="3330007153"/>
+              </p:ext>
+            </p:extLst>
+          </p:nvPr>
+        </p:nvGraphicFramePr>
+        <p:xfrm>
+          <a:off x="3995936" y="1345109"/>
+          <a:ext cx="3333502" cy="4100112"/>
+        </p:xfrm>
+        <a:graphic>
+          <a:graphicData uri="http://schemas.openxmlformats.org/drawingml/2006/table">
+            <a:tbl>
+              <a:tblPr firstRow="1" bandRow="1">
+                <a:tableStyleId>{5C22544A-7EE6-4342-B048-85BDC9FD1C3A}</a:tableStyleId>
+              </a:tblPr>
+              <a:tblGrid>
+                <a:gridCol w="1324278">
+                  <a:extLst>
+                    <a:ext uri="{9D8B030D-6E8A-4147-A177-3AD203B41FA5}">
+                      <a16:colId xmlns:a16="http://schemas.microsoft.com/office/drawing/2014/main" val="20000"/>
+                    </a:ext>
+                  </a:extLst>
+                </a:gridCol>
+                <a:gridCol w="2009224">
+                  <a:extLst>
+                    <a:ext uri="{9D8B030D-6E8A-4147-A177-3AD203B41FA5}">
+                      <a16:colId xmlns:a16="http://schemas.microsoft.com/office/drawing/2014/main" val="20001"/>
+                    </a:ext>
+                  </a:extLst>
+                </a:gridCol>
+              </a:tblGrid>
+              <a:tr h="779611">
+                <a:tc>
+                  <a:txBody>
+                    <a:bodyPr/>
+                    <a:lstStyle/>
+                    <a:p>
+                      <a:pPr algn="ctr" fontAlgn="b"/>
+                      <a:r>
+                        <a:rPr lang="en-CA" sz="1800" b="0" i="0" u="none" strike="noStrike" dirty="0" err="1">
+                          <a:solidFill>
+                            <a:srgbClr val="000000"/>
+                          </a:solidFill>
+                          <a:effectLst/>
+                          <a:latin typeface="Calibri"/>
+                        </a:rPr>
+                        <a:t>Identité</a:t>
+                      </a:r>
+                      <a:r>
+                        <a:rPr lang="en-CA" sz="1800" b="0" i="0" u="none" strike="noStrike" dirty="0">
+                          <a:solidFill>
+                            <a:srgbClr val="000000"/>
+                          </a:solidFill>
+                          <a:effectLst/>
+                          <a:latin typeface="Calibri"/>
+                        </a:rPr>
+                        <a:t> </a:t>
+                      </a:r>
+                      <a:r>
+                        <a:rPr lang="en-CA" sz="1800" b="0" i="0" u="none" strike="noStrike" dirty="0" err="1">
+                          <a:solidFill>
+                            <a:srgbClr val="000000"/>
+                          </a:solidFill>
+                          <a:effectLst/>
+                          <a:latin typeface="Calibri"/>
+                        </a:rPr>
+                        <a:t>étudiant</a:t>
+                      </a:r>
+                      <a:endParaRPr lang="en-CA" sz="1800" b="0" i="0" u="none" strike="noStrike" dirty="0">
+                        <a:solidFill>
+                          <a:srgbClr val="000000"/>
+                        </a:solidFill>
+                        <a:effectLst/>
+                        <a:latin typeface="Calibri"/>
+                      </a:endParaRPr>
+                    </a:p>
+                  </a:txBody>
+                  <a:tcPr marL="9525" marR="9525" marT="9525" marB="0" anchor="ctr"/>
+                </a:tc>
+                <a:tc>
+                  <a:txBody>
+                    <a:bodyPr/>
+                    <a:lstStyle/>
+                    <a:p>
+                      <a:pPr marL="0" marR="0" indent="0" algn="ctr" defTabSz="914400" rtl="0" eaLnBrk="1" fontAlgn="b" latinLnBrk="0" hangingPunct="1">
+                        <a:lnSpc>
+                          <a:spcPct val="100000"/>
+                        </a:lnSpc>
+                        <a:spcBef>
+                          <a:spcPts val="0"/>
+                        </a:spcBef>
+                        <a:spcAft>
+                          <a:spcPts val="0"/>
+                        </a:spcAft>
+                        <a:buClrTx/>
+                        <a:buSzTx/>
+                        <a:buFontTx/>
+                        <a:buNone/>
+                        <a:tabLst/>
+                        <a:defRPr/>
+                      </a:pPr>
+                      <a:r>
+                        <a:rPr lang="en-CA" sz="1800" b="0" i="0" u="none" strike="noStrike" dirty="0">
+                          <a:solidFill>
+                            <a:srgbClr val="000000"/>
+                          </a:solidFill>
+                          <a:effectLst/>
+                          <a:latin typeface="+mn-lt"/>
+                        </a:rPr>
+                        <a:t>Augmentation </a:t>
+                      </a:r>
+                      <a:r>
+                        <a:rPr lang="en-CA" sz="1800" b="0" i="0" u="none" strike="noStrike" dirty="0" err="1">
+                          <a:solidFill>
+                            <a:srgbClr val="000000"/>
+                          </a:solidFill>
+                          <a:effectLst/>
+                          <a:latin typeface="+mn-lt"/>
+                        </a:rPr>
+                        <a:t>moyenne</a:t>
+                      </a:r>
+                      <a:r>
+                        <a:rPr lang="en-CA" sz="1800" b="0" i="0" u="none" strike="noStrike" dirty="0">
+                          <a:solidFill>
+                            <a:srgbClr val="000000"/>
+                          </a:solidFill>
+                          <a:effectLst/>
+                          <a:latin typeface="+mn-lt"/>
+                        </a:rPr>
+                        <a:t> </a:t>
+                      </a:r>
+                      <a:r>
+                        <a:rPr lang="en-CA" sz="1800" b="0" i="0" u="none" strike="noStrike" dirty="0" err="1">
+                          <a:solidFill>
+                            <a:srgbClr val="000000"/>
+                          </a:solidFill>
+                          <a:effectLst/>
+                          <a:latin typeface="+mn-lt"/>
+                        </a:rPr>
+                        <a:t>nécessaire</a:t>
+                      </a:r>
+                      <a:endParaRPr lang="en-CA" sz="1800" b="0" i="0" u="none" strike="noStrike" dirty="0">
+                        <a:solidFill>
+                          <a:srgbClr val="000000"/>
+                        </a:solidFill>
+                        <a:effectLst/>
+                        <a:latin typeface="Calibri"/>
+                      </a:endParaRPr>
+                    </a:p>
+                  </a:txBody>
+                  <a:tcPr marL="9525" marR="9525" marT="9525" marB="0" anchor="ctr"/>
+                </a:tc>
+                <a:extLst>
+                  <a:ext uri="{0D108BD9-81ED-4DB2-BD59-A6C34878D82A}">
+                    <a16:rowId xmlns:a16="http://schemas.microsoft.com/office/drawing/2014/main" val="10000"/>
+                  </a:ext>
+                </a:extLst>
+              </a:tr>
+              <a:tr h="304290">
+                <a:tc>
+                  <a:txBody>
+                    <a:bodyPr/>
+                    <a:lstStyle/>
+                    <a:p>
+                      <a:pPr algn="ctr" fontAlgn="b">
+                        <a:buNone/>
+                      </a:pPr>
+                      <a:r>
+                        <a:rPr lang="en-CA" sz="1100" b="0" i="0" u="none" strike="noStrike" dirty="0">
+                          <a:solidFill>
+                            <a:srgbClr val="000000"/>
+                          </a:solidFill>
+                          <a:effectLst/>
+                          <a:latin typeface="Calibri" panose="020F0502020204030204" pitchFamily="34" charset="0"/>
+                        </a:rPr>
+                        <a:t>8/30/2026 11:40:45</a:t>
+                      </a:r>
+                    </a:p>
+                  </a:txBody>
+                  <a:tcPr marL="9525" marR="9525" marT="9525" marB="0" anchor="ctr"/>
+                </a:tc>
+                <a:tc>
+                  <a:txBody>
+                    <a:bodyPr/>
+                    <a:lstStyle/>
+                    <a:p>
+                      <a:pPr algn="ctr" fontAlgn="b">
+                        <a:buNone/>
+                      </a:pPr>
+                      <a:r>
+                        <a:rPr lang="en-CA" sz="1100" b="0" i="0" u="none" strike="noStrike" dirty="0">
+                          <a:solidFill>
+                            <a:srgbClr val="000000"/>
+                          </a:solidFill>
+                          <a:effectLst/>
+                          <a:latin typeface="Calibri" panose="020F0502020204030204" pitchFamily="34" charset="0"/>
+                        </a:rPr>
+                        <a:t>2651%</a:t>
+                      </a:r>
+                    </a:p>
+                  </a:txBody>
+                  <a:tcPr marL="9525" marR="9525" marT="9525" marB="0" anchor="ctr"/>
+                </a:tc>
+                <a:extLst>
+                  <a:ext uri="{0D108BD9-81ED-4DB2-BD59-A6C34878D82A}">
+                    <a16:rowId xmlns:a16="http://schemas.microsoft.com/office/drawing/2014/main" val="2391649140"/>
+                  </a:ext>
+                </a:extLst>
+              </a:tr>
+              <a:tr h="337089">
+                <a:tc>
+                  <a:txBody>
+                    <a:bodyPr/>
+                    <a:lstStyle/>
+                    <a:p>
+                      <a:pPr algn="ctr" fontAlgn="b">
+                        <a:buNone/>
+                      </a:pPr>
+                      <a:r>
+                        <a:rPr lang="en-CA" sz="1100" b="0" i="0" u="none" strike="noStrike" dirty="0">
+                          <a:solidFill>
+                            <a:srgbClr val="000000"/>
+                          </a:solidFill>
+                          <a:effectLst/>
+                          <a:latin typeface="Calibri" panose="020F0502020204030204" pitchFamily="34" charset="0"/>
+                        </a:rPr>
+                        <a:t>8/27/2026 16:59:48</a:t>
+                      </a:r>
+                    </a:p>
+                  </a:txBody>
+                  <a:tcPr marL="9525" marR="9525" marT="9525" marB="0" anchor="ctr"/>
+                </a:tc>
+                <a:tc>
+                  <a:txBody>
+                    <a:bodyPr/>
+                    <a:lstStyle/>
+                    <a:p>
+                      <a:pPr algn="ctr" fontAlgn="b">
+                        <a:buNone/>
+                      </a:pPr>
+                      <a:r>
+                        <a:rPr lang="en-CA" sz="1100" b="0" i="0" u="none" strike="noStrike" dirty="0">
+                          <a:solidFill>
+                            <a:srgbClr val="000000"/>
+                          </a:solidFill>
+                          <a:effectLst/>
+                          <a:latin typeface="Calibri" panose="020F0502020204030204" pitchFamily="34" charset="0"/>
+                        </a:rPr>
+                        <a:t>3562%</a:t>
+                      </a:r>
+                    </a:p>
+                  </a:txBody>
+                  <a:tcPr marL="9525" marR="9525" marT="9525" marB="0" anchor="ctr"/>
+                </a:tc>
+                <a:extLst>
+                  <a:ext uri="{0D108BD9-81ED-4DB2-BD59-A6C34878D82A}">
+                    <a16:rowId xmlns:a16="http://schemas.microsoft.com/office/drawing/2014/main" val="981569410"/>
+                  </a:ext>
+                </a:extLst>
+              </a:tr>
+              <a:tr h="285057">
+                <a:tc>
+                  <a:txBody>
+                    <a:bodyPr/>
+                    <a:lstStyle/>
+                    <a:p>
+                      <a:pPr algn="ctr" fontAlgn="b">
+                        <a:buNone/>
+                      </a:pPr>
+                      <a:r>
+                        <a:rPr lang="en-CA" sz="1100" b="0" i="0" u="none" strike="noStrike" dirty="0">
+                          <a:solidFill>
+                            <a:srgbClr val="000000"/>
+                          </a:solidFill>
+                          <a:effectLst/>
+                          <a:latin typeface="Calibri" panose="020F0502020204030204" pitchFamily="34" charset="0"/>
+                        </a:rPr>
+                        <a:t>8/26/2026 11:55:53</a:t>
+                      </a:r>
+                    </a:p>
+                  </a:txBody>
+                  <a:tcPr marL="9525" marR="9525" marT="9525" marB="0" anchor="ctr"/>
+                </a:tc>
+                <a:tc>
+                  <a:txBody>
+                    <a:bodyPr/>
+                    <a:lstStyle/>
+                    <a:p>
+                      <a:pPr algn="ctr" fontAlgn="b">
+                        <a:buNone/>
+                      </a:pPr>
+                      <a:r>
+                        <a:rPr lang="en-CA" sz="1100" b="0" i="0" u="none" strike="noStrike" dirty="0">
+                          <a:solidFill>
+                            <a:srgbClr val="000000"/>
+                          </a:solidFill>
+                          <a:effectLst/>
+                          <a:latin typeface="Calibri" panose="020F0502020204030204" pitchFamily="34" charset="0"/>
+                        </a:rPr>
+                        <a:t>3719%</a:t>
+                      </a:r>
+                    </a:p>
+                  </a:txBody>
+                  <a:tcPr marL="9525" marR="9525" marT="9525" marB="0" anchor="ctr"/>
                 </a:tc>
                 <a:extLst>
                   <a:ext uri="{0D108BD9-81ED-4DB2-BD59-A6C34878D82A}">
@@ -6372,54 +7131,50 @@
                   </a:ext>
                 </a:extLst>
               </a:tr>
-              <a:tr h="370840">
-                <a:tc>
-                  <a:txBody>
-                    <a:bodyPr/>
-                    <a:lstStyle/>
-                    <a:p>
-                      <a:pPr algn="r" fontAlgn="b">
+              <a:tr h="285057">
+                <a:tc>
+                  <a:txBody>
+                    <a:bodyPr/>
+                    <a:lstStyle/>
+                    <a:p>
+                      <a:pPr algn="ctr" fontAlgn="b">
                         <a:buNone/>
                       </a:pPr>
                       <a:r>
-                        <a:rPr lang="en-CA" sz="1800" b="0" i="0" u="none" strike="noStrike" kern="1200">
+                        <a:rPr lang="en-CA" sz="1100" b="0" i="0" u="none" strike="noStrike" dirty="0">
                           <a:solidFill>
                             <a:srgbClr val="000000"/>
                           </a:solidFill>
                           <a:effectLst/>
-                          <a:latin typeface="Calibri" charset="0"/>
-                          <a:ea typeface="+mn-ea"/>
-                          <a:cs typeface="+mn-cs"/>
+                          <a:latin typeface="Calibri" panose="020F0502020204030204" pitchFamily="34" charset="0"/>
                         </a:rPr>
-                        <a:t>2914478</a:t>
-                      </a:r>
-                    </a:p>
-                  </a:txBody>
-                  <a:tcPr marL="9525" marR="9525" marT="9525" marB="0" anchor="b"/>
-                </a:tc>
-                <a:tc>
-                  <a:txBody>
-                    <a:bodyPr/>
-                    <a:lstStyle/>
-                    <a:p>
-                      <a:pPr marL="0" algn="r" defTabSz="914400" rtl="0" eaLnBrk="1" fontAlgn="b" latinLnBrk="0" hangingPunct="1">
+                        <a:t>8/26/2026 8:42:16</a:t>
+                      </a:r>
+                    </a:p>
+                  </a:txBody>
+                  <a:tcPr marL="9525" marR="9525" marT="9525" marB="0" anchor="ctr"/>
+                </a:tc>
+                <a:tc>
+                  <a:txBody>
+                    <a:bodyPr/>
+                    <a:lstStyle/>
+                    <a:p>
+                      <a:pPr algn="ctr" fontAlgn="b">
                         <a:buNone/>
                       </a:pPr>
                       <a:r>
-                        <a:rPr lang="en-CA" sz="1800" b="0" i="0" u="none" strike="noStrike" kern="1200" dirty="0">
+                        <a:rPr lang="en-CA" sz="1100" b="0" i="0" u="none" strike="noStrike" dirty="0">
                           <a:solidFill>
                             <a:srgbClr val="000000"/>
                           </a:solidFill>
                           <a:effectLst/>
-                          <a:latin typeface="Calibri" charset="0"/>
-                          <a:ea typeface="+mn-ea"/>
-                          <a:cs typeface="+mn-cs"/>
+                          <a:latin typeface="Calibri" panose="020F0502020204030204" pitchFamily="34" charset="0"/>
                         </a:rPr>
-                        <a:t>182%</a:t>
-                      </a:r>
-                    </a:p>
-                  </a:txBody>
-                  <a:tcPr marL="9525" marR="9525" marT="9525" marB="0" anchor="b"/>
+                        <a:t>8982%</a:t>
+                      </a:r>
+                    </a:p>
+                  </a:txBody>
+                  <a:tcPr marL="9525" marR="9525" marT="9525" marB="0" anchor="ctr"/>
                 </a:tc>
                 <a:extLst>
                   <a:ext uri="{0D108BD9-81ED-4DB2-BD59-A6C34878D82A}">
@@ -6427,54 +7182,50 @@
                   </a:ext>
                 </a:extLst>
               </a:tr>
-              <a:tr h="370840">
-                <a:tc>
-                  <a:txBody>
-                    <a:bodyPr/>
-                    <a:lstStyle/>
-                    <a:p>
-                      <a:pPr algn="r" fontAlgn="b">
+              <a:tr h="285057">
+                <a:tc>
+                  <a:txBody>
+                    <a:bodyPr/>
+                    <a:lstStyle/>
+                    <a:p>
+                      <a:pPr algn="ctr" fontAlgn="b">
                         <a:buNone/>
                       </a:pPr>
                       <a:r>
-                        <a:rPr lang="en-CA" sz="1800" b="0" i="0" u="none" strike="noStrike" kern="1200">
+                        <a:rPr lang="en-CA" sz="1100" b="0" i="0" u="none" strike="noStrike">
                           <a:solidFill>
                             <a:srgbClr val="000000"/>
                           </a:solidFill>
                           <a:effectLst/>
-                          <a:latin typeface="Calibri" charset="0"/>
-                          <a:ea typeface="+mn-ea"/>
-                          <a:cs typeface="+mn-cs"/>
+                          <a:latin typeface="Calibri" panose="020F0502020204030204" pitchFamily="34" charset="0"/>
                         </a:rPr>
-                        <a:t>2914544</a:t>
-                      </a:r>
-                    </a:p>
-                  </a:txBody>
-                  <a:tcPr marL="9525" marR="9525" marT="9525" marB="0" anchor="b"/>
-                </a:tc>
-                <a:tc>
-                  <a:txBody>
-                    <a:bodyPr/>
-                    <a:lstStyle/>
-                    <a:p>
-                      <a:pPr marL="0" algn="r" defTabSz="914400" rtl="0" eaLnBrk="1" fontAlgn="b" latinLnBrk="0" hangingPunct="1">
+                        <a:t>8/28/2026 16:02:24</a:t>
+                      </a:r>
+                    </a:p>
+                  </a:txBody>
+                  <a:tcPr marL="9525" marR="9525" marT="9525" marB="0" anchor="ctr"/>
+                </a:tc>
+                <a:tc>
+                  <a:txBody>
+                    <a:bodyPr/>
+                    <a:lstStyle/>
+                    <a:p>
+                      <a:pPr algn="ctr" fontAlgn="b">
                         <a:buNone/>
                       </a:pPr>
                       <a:r>
-                        <a:rPr lang="en-CA" sz="1800" b="0" i="0" u="none" strike="noStrike" kern="1200" dirty="0">
+                        <a:rPr lang="en-CA" sz="1100" b="0" i="0" u="none" strike="noStrike" dirty="0">
                           <a:solidFill>
                             <a:srgbClr val="000000"/>
                           </a:solidFill>
                           <a:effectLst/>
-                          <a:latin typeface="Calibri" charset="0"/>
-                          <a:ea typeface="+mn-ea"/>
-                          <a:cs typeface="+mn-cs"/>
+                          <a:latin typeface="Calibri" panose="020F0502020204030204" pitchFamily="34" charset="0"/>
                         </a:rPr>
-                        <a:t>830%</a:t>
-                      </a:r>
-                    </a:p>
-                  </a:txBody>
-                  <a:tcPr marL="9525" marR="9525" marT="9525" marB="0" anchor="b"/>
+                        <a:t>13464%</a:t>
+                      </a:r>
+                    </a:p>
+                  </a:txBody>
+                  <a:tcPr marL="9525" marR="9525" marT="9525" marB="0" anchor="ctr"/>
                 </a:tc>
                 <a:extLst>
                   <a:ext uri="{0D108BD9-81ED-4DB2-BD59-A6C34878D82A}">
@@ -6482,54 +7233,50 @@
                   </a:ext>
                 </a:extLst>
               </a:tr>
-              <a:tr h="370840">
-                <a:tc>
-                  <a:txBody>
-                    <a:bodyPr/>
-                    <a:lstStyle/>
-                    <a:p>
-                      <a:pPr algn="r" fontAlgn="b">
+              <a:tr h="327402">
+                <a:tc>
+                  <a:txBody>
+                    <a:bodyPr/>
+                    <a:lstStyle/>
+                    <a:p>
+                      <a:pPr algn="ctr" fontAlgn="b">
                         <a:buNone/>
                       </a:pPr>
                       <a:r>
-                        <a:rPr lang="en-CA" sz="1800" b="0" i="0" u="none" strike="noStrike" kern="1200">
+                        <a:rPr lang="en-CA" sz="1100" b="0" i="0" u="none" strike="noStrike">
                           <a:solidFill>
                             <a:srgbClr val="000000"/>
                           </a:solidFill>
                           <a:effectLst/>
-                          <a:latin typeface="Calibri" charset="0"/>
-                          <a:ea typeface="+mn-ea"/>
-                          <a:cs typeface="+mn-cs"/>
+                          <a:latin typeface="Calibri" panose="020F0502020204030204" pitchFamily="34" charset="0"/>
                         </a:rPr>
-                        <a:t>2914722</a:t>
-                      </a:r>
-                    </a:p>
-                  </a:txBody>
-                  <a:tcPr marL="9525" marR="9525" marT="9525" marB="0" anchor="b"/>
-                </a:tc>
-                <a:tc>
-                  <a:txBody>
-                    <a:bodyPr/>
-                    <a:lstStyle/>
-                    <a:p>
-                      <a:pPr marL="0" algn="r" defTabSz="914400" rtl="0" eaLnBrk="1" fontAlgn="b" latinLnBrk="0" hangingPunct="1">
+                        <a:t>8/27/2026 20:03:18</a:t>
+                      </a:r>
+                    </a:p>
+                  </a:txBody>
+                  <a:tcPr marL="9525" marR="9525" marT="9525" marB="0" anchor="ctr"/>
+                </a:tc>
+                <a:tc>
+                  <a:txBody>
+                    <a:bodyPr/>
+                    <a:lstStyle/>
+                    <a:p>
+                      <a:pPr algn="ctr" fontAlgn="b">
                         <a:buNone/>
                       </a:pPr>
                       <a:r>
-                        <a:rPr lang="en-CA" sz="1800" b="0" i="0" u="none" strike="noStrike" kern="1200" dirty="0">
+                        <a:rPr lang="en-CA" sz="1100" b="0" i="0" u="none" strike="noStrike" dirty="0">
                           <a:solidFill>
                             <a:srgbClr val="000000"/>
                           </a:solidFill>
                           <a:effectLst/>
-                          <a:latin typeface="Calibri" charset="0"/>
-                          <a:ea typeface="+mn-ea"/>
-                          <a:cs typeface="+mn-cs"/>
+                          <a:latin typeface="Calibri" panose="020F0502020204030204" pitchFamily="34" charset="0"/>
                         </a:rPr>
-                        <a:t>1083%</a:t>
-                      </a:r>
-                    </a:p>
-                  </a:txBody>
-                  <a:tcPr marL="9525" marR="9525" marT="9525" marB="0" anchor="b"/>
+                        <a:t>15103%</a:t>
+                      </a:r>
+                    </a:p>
+                  </a:txBody>
+                  <a:tcPr marL="9525" marR="9525" marT="9525" marB="0" anchor="ctr"/>
                 </a:tc>
                 <a:extLst>
                   <a:ext uri="{0D108BD9-81ED-4DB2-BD59-A6C34878D82A}">
@@ -6537,54 +7284,50 @@
                   </a:ext>
                 </a:extLst>
               </a:tr>
-              <a:tr h="370840">
-                <a:tc>
-                  <a:txBody>
-                    <a:bodyPr/>
-                    <a:lstStyle/>
-                    <a:p>
-                      <a:pPr algn="r" fontAlgn="b">
+              <a:tr h="242712">
+                <a:tc>
+                  <a:txBody>
+                    <a:bodyPr/>
+                    <a:lstStyle/>
+                    <a:p>
+                      <a:pPr algn="ctr" fontAlgn="b">
                         <a:buNone/>
                       </a:pPr>
                       <a:r>
-                        <a:rPr lang="en-CA" sz="1800" b="0" i="0" u="none" strike="noStrike" kern="1200">
+                        <a:rPr lang="en-CA" sz="1100" b="0" i="0" u="none" strike="noStrike">
                           <a:solidFill>
                             <a:srgbClr val="000000"/>
                           </a:solidFill>
                           <a:effectLst/>
-                          <a:latin typeface="Calibri" charset="0"/>
-                          <a:ea typeface="+mn-ea"/>
-                          <a:cs typeface="+mn-cs"/>
+                          <a:latin typeface="Calibri" panose="020F0502020204030204" pitchFamily="34" charset="0"/>
                         </a:rPr>
-                        <a:t>2914745</a:t>
-                      </a:r>
-                    </a:p>
-                  </a:txBody>
-                  <a:tcPr marL="9525" marR="9525" marT="9525" marB="0" anchor="b"/>
-                </a:tc>
-                <a:tc>
-                  <a:txBody>
-                    <a:bodyPr/>
-                    <a:lstStyle/>
-                    <a:p>
-                      <a:pPr marL="0" algn="r" defTabSz="914400" rtl="0" eaLnBrk="1" fontAlgn="b" latinLnBrk="0" hangingPunct="1">
+                        <a:t>8/29/2026 20:11:50</a:t>
+                      </a:r>
+                    </a:p>
+                  </a:txBody>
+                  <a:tcPr marL="9525" marR="9525" marT="9525" marB="0" anchor="ctr"/>
+                </a:tc>
+                <a:tc>
+                  <a:txBody>
+                    <a:bodyPr/>
+                    <a:lstStyle/>
+                    <a:p>
+                      <a:pPr algn="ctr" fontAlgn="b">
                         <a:buNone/>
                       </a:pPr>
                       <a:r>
-                        <a:rPr lang="en-CA" sz="1800" b="0" i="0" u="none" strike="noStrike" kern="1200" dirty="0">
+                        <a:rPr lang="en-CA" sz="1100" b="0" i="0" u="none" strike="noStrike" dirty="0">
                           <a:solidFill>
                             <a:srgbClr val="000000"/>
                           </a:solidFill>
                           <a:effectLst/>
-                          <a:latin typeface="Calibri" charset="0"/>
-                          <a:ea typeface="+mn-ea"/>
-                          <a:cs typeface="+mn-cs"/>
+                          <a:latin typeface="Calibri" panose="020F0502020204030204" pitchFamily="34" charset="0"/>
                         </a:rPr>
-                        <a:t>4063%</a:t>
-                      </a:r>
-                    </a:p>
-                  </a:txBody>
-                  <a:tcPr marL="9525" marR="9525" marT="9525" marB="0" anchor="b"/>
+                        <a:t>36525%</a:t>
+                      </a:r>
+                    </a:p>
+                  </a:txBody>
+                  <a:tcPr marL="9525" marR="9525" marT="9525" marB="0" anchor="ctr"/>
                 </a:tc>
                 <a:extLst>
                   <a:ext uri="{0D108BD9-81ED-4DB2-BD59-A6C34878D82A}">
@@ -6592,54 +7335,50 @@
                   </a:ext>
                 </a:extLst>
               </a:tr>
-              <a:tr h="249887">
-                <a:tc>
-                  <a:txBody>
-                    <a:bodyPr/>
-                    <a:lstStyle/>
-                    <a:p>
-                      <a:pPr algn="r" fontAlgn="b">
+              <a:tr h="285057">
+                <a:tc>
+                  <a:txBody>
+                    <a:bodyPr/>
+                    <a:lstStyle/>
+                    <a:p>
+                      <a:pPr algn="ctr" fontAlgn="b">
                         <a:buNone/>
                       </a:pPr>
                       <a:r>
-                        <a:rPr lang="en-CA" sz="1800" b="0" i="0" u="none" strike="noStrike" kern="1200">
+                        <a:rPr lang="en-CA" sz="1100" b="0" i="0" u="none" strike="noStrike">
                           <a:solidFill>
                             <a:srgbClr val="000000"/>
                           </a:solidFill>
                           <a:effectLst/>
-                          <a:latin typeface="Calibri" charset="0"/>
-                          <a:ea typeface="+mn-ea"/>
-                          <a:cs typeface="+mn-cs"/>
+                          <a:latin typeface="Calibri" panose="020F0502020204030204" pitchFamily="34" charset="0"/>
                         </a:rPr>
-                        <a:t>2914556</a:t>
-                      </a:r>
-                    </a:p>
-                  </a:txBody>
-                  <a:tcPr marL="9525" marR="9525" marT="9525" marB="0" anchor="b"/>
-                </a:tc>
-                <a:tc>
-                  <a:txBody>
-                    <a:bodyPr/>
-                    <a:lstStyle/>
-                    <a:p>
-                      <a:pPr marL="0" algn="r" defTabSz="914400" rtl="0" eaLnBrk="1" fontAlgn="b" latinLnBrk="0" hangingPunct="1">
+                        <a:t>8/26/2026 14:50:05</a:t>
+                      </a:r>
+                    </a:p>
+                  </a:txBody>
+                  <a:tcPr marL="9525" marR="9525" marT="9525" marB="0" anchor="ctr"/>
+                </a:tc>
+                <a:tc>
+                  <a:txBody>
+                    <a:bodyPr/>
+                    <a:lstStyle/>
+                    <a:p>
+                      <a:pPr algn="ctr" fontAlgn="b">
                         <a:buNone/>
                       </a:pPr>
                       <a:r>
-                        <a:rPr lang="en-CA" sz="1800" b="0" i="0" u="none" strike="noStrike" kern="1200" dirty="0">
+                        <a:rPr lang="en-CA" sz="1100" b="0" i="0" u="none" strike="noStrike" dirty="0">
                           <a:solidFill>
                             <a:srgbClr val="000000"/>
                           </a:solidFill>
                           <a:effectLst/>
-                          <a:latin typeface="Calibri" charset="0"/>
-                          <a:ea typeface="+mn-ea"/>
-                          <a:cs typeface="+mn-cs"/>
+                          <a:latin typeface="Calibri" panose="020F0502020204030204" pitchFamily="34" charset="0"/>
                         </a:rPr>
-                        <a:t>5043%</a:t>
-                      </a:r>
-                    </a:p>
-                  </a:txBody>
-                  <a:tcPr marL="9525" marR="9525" marT="9525" marB="0" anchor="b"/>
+                        <a:t>48368%</a:t>
+                      </a:r>
+                    </a:p>
+                  </a:txBody>
+                  <a:tcPr marL="9525" marR="9525" marT="9525" marB="0" anchor="ctr"/>
                 </a:tc>
                 <a:extLst>
                   <a:ext uri="{0D108BD9-81ED-4DB2-BD59-A6C34878D82A}">
@@ -6647,54 +7386,50 @@
                   </a:ext>
                 </a:extLst>
               </a:tr>
-              <a:tr h="370840">
-                <a:tc>
-                  <a:txBody>
-                    <a:bodyPr/>
-                    <a:lstStyle/>
-                    <a:p>
-                      <a:pPr algn="r" fontAlgn="b">
+              <a:tr h="327402">
+                <a:tc>
+                  <a:txBody>
+                    <a:bodyPr/>
+                    <a:lstStyle/>
+                    <a:p>
+                      <a:pPr algn="ctr" fontAlgn="b">
                         <a:buNone/>
                       </a:pPr>
                       <a:r>
-                        <a:rPr lang="en-CA" sz="1800" b="0" i="0" u="none" strike="noStrike" kern="1200" dirty="0">
+                        <a:rPr lang="en-CA" sz="1100" b="0" i="0" u="none" strike="noStrike">
                           <a:solidFill>
                             <a:srgbClr val="000000"/>
                           </a:solidFill>
                           <a:effectLst/>
-                          <a:latin typeface="Calibri" charset="0"/>
-                          <a:ea typeface="+mn-ea"/>
-                          <a:cs typeface="+mn-cs"/>
+                          <a:latin typeface="Calibri" panose="020F0502020204030204" pitchFamily="34" charset="0"/>
                         </a:rPr>
-                        <a:t>2914485</a:t>
-                      </a:r>
-                    </a:p>
-                  </a:txBody>
-                  <a:tcPr marL="9525" marR="9525" marT="9525" marB="0" anchor="b"/>
-                </a:tc>
-                <a:tc>
-                  <a:txBody>
-                    <a:bodyPr/>
-                    <a:lstStyle/>
-                    <a:p>
-                      <a:pPr marL="0" algn="r" defTabSz="914400" rtl="0" eaLnBrk="1" fontAlgn="b" latinLnBrk="0" hangingPunct="1">
+                        <a:t>8/27/2026 18:49:53</a:t>
+                      </a:r>
+                    </a:p>
+                  </a:txBody>
+                  <a:tcPr marL="9525" marR="9525" marT="9525" marB="0" anchor="ctr"/>
+                </a:tc>
+                <a:tc>
+                  <a:txBody>
+                    <a:bodyPr/>
+                    <a:lstStyle/>
+                    <a:p>
+                      <a:pPr algn="ctr" fontAlgn="b">
                         <a:buNone/>
                       </a:pPr>
                       <a:r>
-                        <a:rPr lang="en-CA" sz="1800" b="0" i="0" u="none" strike="noStrike" kern="1200" dirty="0">
+                        <a:rPr lang="en-CA" sz="1100" b="0" i="0" u="none" strike="noStrike" dirty="0">
                           <a:solidFill>
                             <a:srgbClr val="000000"/>
                           </a:solidFill>
                           <a:effectLst/>
-                          <a:latin typeface="Calibri" charset="0"/>
-                          <a:ea typeface="+mn-ea"/>
-                          <a:cs typeface="+mn-cs"/>
+                          <a:latin typeface="Calibri" panose="020F0502020204030204" pitchFamily="34" charset="0"/>
                         </a:rPr>
-                        <a:t>6916%</a:t>
-                      </a:r>
-                    </a:p>
-                  </a:txBody>
-                  <a:tcPr marL="9525" marR="9525" marT="9525" marB="0" anchor="b"/>
+                        <a:t>72982%</a:t>
+                      </a:r>
+                    </a:p>
+                  </a:txBody>
+                  <a:tcPr marL="9525" marR="9525" marT="9525" marB="0" anchor="ctr"/>
                 </a:tc>
                 <a:extLst>
                   <a:ext uri="{0D108BD9-81ED-4DB2-BD59-A6C34878D82A}">
@@ -6702,54 +7437,50 @@
                   </a:ext>
                 </a:extLst>
               </a:tr>
-              <a:tr h="370840">
-                <a:tc>
-                  <a:txBody>
-                    <a:bodyPr/>
-                    <a:lstStyle/>
-                    <a:p>
-                      <a:pPr algn="r" fontAlgn="b">
+              <a:tr h="313976">
+                <a:tc>
+                  <a:txBody>
+                    <a:bodyPr/>
+                    <a:lstStyle/>
+                    <a:p>
+                      <a:pPr algn="ctr" fontAlgn="b">
                         <a:buNone/>
                       </a:pPr>
                       <a:r>
-                        <a:rPr lang="en-CA" sz="1800" b="0" i="0" u="none" strike="noStrike" kern="1200" dirty="0">
+                        <a:rPr lang="en-CA" sz="1100" b="0" i="0" u="none" strike="noStrike">
                           <a:solidFill>
                             <a:srgbClr val="000000"/>
                           </a:solidFill>
                           <a:effectLst/>
-                          <a:latin typeface="Calibri" charset="0"/>
-                          <a:ea typeface="+mn-ea"/>
-                          <a:cs typeface="+mn-cs"/>
+                          <a:latin typeface="Calibri" panose="020F0502020204030204" pitchFamily="34" charset="0"/>
                         </a:rPr>
-                        <a:t>2914675</a:t>
-                      </a:r>
-                    </a:p>
-                  </a:txBody>
-                  <a:tcPr marL="9525" marR="9525" marT="9525" marB="0" anchor="b"/>
-                </a:tc>
-                <a:tc>
-                  <a:txBody>
-                    <a:bodyPr/>
-                    <a:lstStyle/>
-                    <a:p>
-                      <a:pPr marL="0" algn="r" defTabSz="914400" rtl="0" eaLnBrk="1" fontAlgn="b" latinLnBrk="0" hangingPunct="1">
+                        <a:t>8/27/2026 13:39:00</a:t>
+                      </a:r>
+                    </a:p>
+                  </a:txBody>
+                  <a:tcPr marL="9525" marR="9525" marT="9525" marB="0" anchor="ctr"/>
+                </a:tc>
+                <a:tc>
+                  <a:txBody>
+                    <a:bodyPr/>
+                    <a:lstStyle/>
+                    <a:p>
+                      <a:pPr algn="ctr" fontAlgn="b">
                         <a:buNone/>
                       </a:pPr>
                       <a:r>
-                        <a:rPr lang="en-CA" sz="1800" b="0" i="0" u="none" strike="noStrike" kern="1200" dirty="0">
+                        <a:rPr lang="en-CA" sz="1100" b="0" i="0" u="none" strike="noStrike" dirty="0">
                           <a:solidFill>
                             <a:srgbClr val="000000"/>
                           </a:solidFill>
                           <a:effectLst/>
-                          <a:latin typeface="Calibri" charset="0"/>
-                          <a:ea typeface="+mn-ea"/>
-                          <a:cs typeface="+mn-cs"/>
+                          <a:latin typeface="Calibri" panose="020F0502020204030204" pitchFamily="34" charset="0"/>
                         </a:rPr>
-                        <a:t>7900%</a:t>
-                      </a:r>
-                    </a:p>
-                  </a:txBody>
-                  <a:tcPr marL="9525" marR="9525" marT="9525" marB="0" anchor="b"/>
+                        <a:t>144562%</a:t>
+                      </a:r>
+                    </a:p>
+                  </a:txBody>
+                  <a:tcPr marL="9525" marR="9525" marT="9525" marB="0" anchor="ctr"/>
                 </a:tc>
                 <a:extLst>
                   <a:ext uri="{0D108BD9-81ED-4DB2-BD59-A6C34878D82A}">
@@ -6757,54 +7488,50 @@
                   </a:ext>
                 </a:extLst>
               </a:tr>
-              <a:tr h="370840">
-                <a:tc>
-                  <a:txBody>
-                    <a:bodyPr/>
-                    <a:lstStyle/>
-                    <a:p>
-                      <a:pPr algn="r" fontAlgn="b">
+              <a:tr h="327402">
+                <a:tc>
+                  <a:txBody>
+                    <a:bodyPr/>
+                    <a:lstStyle/>
+                    <a:p>
+                      <a:pPr algn="ctr" fontAlgn="b">
                         <a:buNone/>
                       </a:pPr>
                       <a:r>
-                        <a:rPr lang="en-CA" sz="1800" b="0" i="0" u="none" strike="noStrike" kern="1200" dirty="0">
+                        <a:rPr lang="en-CA" sz="1100" b="0" i="0" u="none" strike="noStrike">
                           <a:solidFill>
                             <a:srgbClr val="000000"/>
                           </a:solidFill>
                           <a:effectLst/>
-                          <a:latin typeface="Calibri" charset="0"/>
-                          <a:ea typeface="+mn-ea"/>
-                          <a:cs typeface="+mn-cs"/>
+                          <a:latin typeface="Calibri" panose="020F0502020204030204" pitchFamily="34" charset="0"/>
                         </a:rPr>
-                        <a:t>2914696</a:t>
-                      </a:r>
-                    </a:p>
-                  </a:txBody>
-                  <a:tcPr marL="9525" marR="9525" marT="9525" marB="0" anchor="b"/>
-                </a:tc>
-                <a:tc>
-                  <a:txBody>
-                    <a:bodyPr/>
-                    <a:lstStyle/>
-                    <a:p>
-                      <a:pPr marL="0" algn="r" defTabSz="914400" rtl="0" eaLnBrk="1" fontAlgn="b" latinLnBrk="0" hangingPunct="1">
+                        <a:t>8/30/2026 20:41:08</a:t>
+                      </a:r>
+                    </a:p>
+                  </a:txBody>
+                  <a:tcPr marL="9525" marR="9525" marT="9525" marB="0" anchor="ctr"/>
+                </a:tc>
+                <a:tc>
+                  <a:txBody>
+                    <a:bodyPr/>
+                    <a:lstStyle/>
+                    <a:p>
+                      <a:pPr algn="ctr" fontAlgn="b">
                         <a:buNone/>
                       </a:pPr>
                       <a:r>
-                        <a:rPr lang="en-CA" sz="1800" b="0" i="0" u="none" strike="noStrike" kern="1200" dirty="0">
+                        <a:rPr lang="en-CA" sz="1100" b="0" i="0" u="none" strike="noStrike" dirty="0">
                           <a:solidFill>
                             <a:srgbClr val="000000"/>
                           </a:solidFill>
                           <a:effectLst/>
-                          <a:latin typeface="Calibri" charset="0"/>
-                          <a:ea typeface="+mn-ea"/>
-                          <a:cs typeface="+mn-cs"/>
+                          <a:latin typeface="Calibri" panose="020F0502020204030204" pitchFamily="34" charset="0"/>
                         </a:rPr>
-                        <a:t>104770%</a:t>
-                      </a:r>
-                    </a:p>
-                  </a:txBody>
-                  <a:tcPr marL="9525" marR="9525" marT="9525" marB="0" anchor="b"/>
+                        <a:t>279039%</a:t>
+                      </a:r>
+                    </a:p>
+                  </a:txBody>
+                  <a:tcPr marL="9525" marR="9525" marT="9525" marB="0" anchor="ctr"/>
                 </a:tc>
                 <a:extLst>
                   <a:ext uri="{0D108BD9-81ED-4DB2-BD59-A6C34878D82A}">
